--- a/db-relaties.pptx
+++ b/db-relaties.pptx
@@ -104,7 +104,66 @@
       </a:defRPr>
     </a:lvl9pPr>
   </p:defaultTextStyle>
+  <p:extLst>
+    <p:ext uri="{EFAFB233-063F-42B5-8137-9DF3F51BA10A}">
+      <p15:sldGuideLst xmlns:p15="http://schemas.microsoft.com/office/powerpoint/2012/main"/>
+    </p:ext>
+  </p:extLst>
 </p:presentation>
+</file>
+
+<file path=ppt/ink/ink1.xml><?xml version="1.0" encoding="utf-8"?>
+<inkml:ink xmlns:inkml="http://www.w3.org/2003/InkML">
+  <inkml:definitions>
+    <inkml:context xml:id="ctx0">
+      <inkml:inkSource xml:id="inkSrc0">
+        <inkml:traceFormat>
+          <inkml:channel name="X" type="integer" min="-2.14748E9" max="2.14748E9" units="cm"/>
+          <inkml:channel name="Y" type="integer" min="-2.14748E9" max="2.14748E9" units="cm"/>
+          <inkml:channel name="F" type="integer" max="32767" units="dev"/>
+        </inkml:traceFormat>
+        <inkml:channelProperties>
+          <inkml:channelProperty channel="X" name="resolution" value="1000" units="1/cm"/>
+          <inkml:channelProperty channel="Y" name="resolution" value="1000" units="1/cm"/>
+          <inkml:channelProperty channel="F" name="resolution" value="0" units="1/dev"/>
+        </inkml:channelProperties>
+      </inkml:inkSource>
+      <inkml:timestamp xml:id="ts0" timeString="2026-09-08T08:11:01.542"/>
+    </inkml:context>
+    <inkml:brush xml:id="br0">
+      <inkml:brushProperty name="width" value="0.035" units="cm"/>
+      <inkml:brushProperty name="height" value="0.035" units="cm"/>
+    </inkml:brush>
+  </inkml:definitions>
+  <inkml:trace contextRef="#ctx0" brushRef="#br0">3187 623 24450,'-3187'-623'0</inkml:trace>
+</inkml:ink>
+</file>
+
+<file path=ppt/ink/ink2.xml><?xml version="1.0" encoding="utf-8"?>
+<inkml:ink xmlns:inkml="http://www.w3.org/2003/InkML">
+  <inkml:definitions>
+    <inkml:context xml:id="ctx0">
+      <inkml:inkSource xml:id="inkSrc0">
+        <inkml:traceFormat>
+          <inkml:channel name="X" type="integer" min="-2.14748E9" max="2.14748E9" units="cm"/>
+          <inkml:channel name="Y" type="integer" min="-2.14748E9" max="2.14748E9" units="cm"/>
+          <inkml:channel name="F" type="integer" max="32767" units="dev"/>
+        </inkml:traceFormat>
+        <inkml:channelProperties>
+          <inkml:channelProperty channel="X" name="resolution" value="1000" units="1/cm"/>
+          <inkml:channelProperty channel="Y" name="resolution" value="1000" units="1/cm"/>
+          <inkml:channelProperty channel="F" name="resolution" value="0" units="1/dev"/>
+        </inkml:channelProperties>
+      </inkml:inkSource>
+      <inkml:timestamp xml:id="ts0" timeString="2026-09-08T08:11:05.250"/>
+    </inkml:context>
+    <inkml:brush xml:id="br0">
+      <inkml:brushProperty name="width" value="0.035" units="cm"/>
+      <inkml:brushProperty name="height" value="0.035" units="cm"/>
+    </inkml:brush>
+  </inkml:definitions>
+  <inkml:trace contextRef="#ctx0" brushRef="#br0">1 0 24575,'0'552'-1365,"0"-531"-5461</inkml:trace>
+</inkml:ink>
 </file>
 
 <file path=ppt/slideLayouts/slideLayout1.xml><?xml version="1.0" encoding="utf-8"?>
@@ -254,7 +313,7 @@
           <a:p>
             <a:fld id="{DE20EE3A-6FCC-4075-BC0D-494889CB012D}" type="datetimeFigureOut">
               <a:rPr lang="nl-NL" smtClean="0"/>
-              <a:t>31-8-2026</a:t>
+              <a:t>8-9-2026</a:t>
             </a:fld>
             <a:endParaRPr lang="nl-NL"/>
           </a:p>
@@ -452,7 +511,7 @@
           <a:p>
             <a:fld id="{DE20EE3A-6FCC-4075-BC0D-494889CB012D}" type="datetimeFigureOut">
               <a:rPr lang="nl-NL" smtClean="0"/>
-              <a:t>31-8-2026</a:t>
+              <a:t>8-9-2026</a:t>
             </a:fld>
             <a:endParaRPr lang="nl-NL"/>
           </a:p>
@@ -660,7 +719,7 @@
           <a:p>
             <a:fld id="{DE20EE3A-6FCC-4075-BC0D-494889CB012D}" type="datetimeFigureOut">
               <a:rPr lang="nl-NL" smtClean="0"/>
-              <a:t>31-8-2026</a:t>
+              <a:t>8-9-2026</a:t>
             </a:fld>
             <a:endParaRPr lang="nl-NL"/>
           </a:p>
@@ -858,7 +917,7 @@
           <a:p>
             <a:fld id="{DE20EE3A-6FCC-4075-BC0D-494889CB012D}" type="datetimeFigureOut">
               <a:rPr lang="nl-NL" smtClean="0"/>
-              <a:t>31-8-2026</a:t>
+              <a:t>8-9-2026</a:t>
             </a:fld>
             <a:endParaRPr lang="nl-NL"/>
           </a:p>
@@ -1133,7 +1192,7 @@
           <a:p>
             <a:fld id="{DE20EE3A-6FCC-4075-BC0D-494889CB012D}" type="datetimeFigureOut">
               <a:rPr lang="nl-NL" smtClean="0"/>
-              <a:t>31-8-2026</a:t>
+              <a:t>8-9-2026</a:t>
             </a:fld>
             <a:endParaRPr lang="nl-NL"/>
           </a:p>
@@ -1398,7 +1457,7 @@
           <a:p>
             <a:fld id="{DE20EE3A-6FCC-4075-BC0D-494889CB012D}" type="datetimeFigureOut">
               <a:rPr lang="nl-NL" smtClean="0"/>
-              <a:t>31-8-2026</a:t>
+              <a:t>8-9-2026</a:t>
             </a:fld>
             <a:endParaRPr lang="nl-NL"/>
           </a:p>
@@ -1810,7 +1869,7 @@
           <a:p>
             <a:fld id="{DE20EE3A-6FCC-4075-BC0D-494889CB012D}" type="datetimeFigureOut">
               <a:rPr lang="nl-NL" smtClean="0"/>
-              <a:t>31-8-2026</a:t>
+              <a:t>8-9-2026</a:t>
             </a:fld>
             <a:endParaRPr lang="nl-NL"/>
           </a:p>
@@ -1951,7 +2010,7 @@
           <a:p>
             <a:fld id="{DE20EE3A-6FCC-4075-BC0D-494889CB012D}" type="datetimeFigureOut">
               <a:rPr lang="nl-NL" smtClean="0"/>
-              <a:t>31-8-2026</a:t>
+              <a:t>8-9-2026</a:t>
             </a:fld>
             <a:endParaRPr lang="nl-NL"/>
           </a:p>
@@ -2064,7 +2123,7 @@
           <a:p>
             <a:fld id="{DE20EE3A-6FCC-4075-BC0D-494889CB012D}" type="datetimeFigureOut">
               <a:rPr lang="nl-NL" smtClean="0"/>
-              <a:t>31-8-2026</a:t>
+              <a:t>8-9-2026</a:t>
             </a:fld>
             <a:endParaRPr lang="nl-NL"/>
           </a:p>
@@ -2375,7 +2434,7 @@
           <a:p>
             <a:fld id="{DE20EE3A-6FCC-4075-BC0D-494889CB012D}" type="datetimeFigureOut">
               <a:rPr lang="nl-NL" smtClean="0"/>
-              <a:t>31-8-2026</a:t>
+              <a:t>8-9-2026</a:t>
             </a:fld>
             <a:endParaRPr lang="nl-NL"/>
           </a:p>
@@ -2663,7 +2722,7 @@
           <a:p>
             <a:fld id="{DE20EE3A-6FCC-4075-BC0D-494889CB012D}" type="datetimeFigureOut">
               <a:rPr lang="nl-NL" smtClean="0"/>
-              <a:t>31-8-2026</a:t>
+              <a:t>8-9-2026</a:t>
             </a:fld>
             <a:endParaRPr lang="nl-NL"/>
           </a:p>
@@ -2904,7 +2963,7 @@
           <a:p>
             <a:fld id="{DE20EE3A-6FCC-4075-BC0D-494889CB012D}" type="datetimeFigureOut">
               <a:rPr lang="nl-NL" smtClean="0"/>
-              <a:t>31-8-2026</a:t>
+              <a:t>8-9-2026</a:t>
             </a:fld>
             <a:endParaRPr lang="nl-NL"/>
           </a:p>
@@ -3321,12 +3380,591 @@
           <a:chExt cx="0" cy="0"/>
         </a:xfrm>
       </p:grpSpPr>
-      <p:sp>
-        <p:nvSpPr>
-          <p:cNvPr id="10" name="Rechthoek 9">
-            <a:extLst>
-              <a:ext uri="{FF2B5EF4-FFF2-40B4-BE49-F238E27FC236}">
-                <a16:creationId xmlns:a16="http://schemas.microsoft.com/office/drawing/2014/main" id="{D7077277-88F5-63F9-BEC7-2D81E975AEAA}"/>
+      <p:grpSp>
+        <p:nvGrpSpPr>
+          <p:cNvPr id="5" name="Groep 4">
+            <a:extLst>
+              <a:ext uri="{FF2B5EF4-FFF2-40B4-BE49-F238E27FC236}">
+                <a16:creationId xmlns:a16="http://schemas.microsoft.com/office/drawing/2014/main" id="{3C69613D-57CF-02A2-FDE1-E897B1411389}"/>
+              </a:ext>
+            </a:extLst>
+          </p:cNvPr>
+          <p:cNvGrpSpPr/>
+          <p:nvPr/>
+        </p:nvGrpSpPr>
+        <p:grpSpPr>
+          <a:xfrm>
+            <a:off x="1442052" y="1147312"/>
+            <a:ext cx="2096219" cy="1992702"/>
+            <a:chOff x="9011728" y="508958"/>
+            <a:chExt cx="2096219" cy="1992702"/>
+          </a:xfrm>
+        </p:grpSpPr>
+        <p:sp>
+          <p:nvSpPr>
+            <p:cNvPr id="6" name="Rechthoek 5">
+              <a:extLst>
+                <a:ext uri="{FF2B5EF4-FFF2-40B4-BE49-F238E27FC236}">
+                  <a16:creationId xmlns:a16="http://schemas.microsoft.com/office/drawing/2014/main" id="{C0BAE965-173E-BADF-1561-D7388632C893}"/>
+                </a:ext>
+              </a:extLst>
+            </p:cNvPr>
+            <p:cNvSpPr/>
+            <p:nvPr/>
+          </p:nvSpPr>
+          <p:spPr>
+            <a:xfrm>
+              <a:off x="9011728" y="862641"/>
+              <a:ext cx="2096219" cy="1639019"/>
+            </a:xfrm>
+            <a:prstGeom prst="rect">
+              <a:avLst/>
+            </a:prstGeom>
+            <a:solidFill>
+              <a:schemeClr val="bg2">
+                <a:lumMod val="90000"/>
+              </a:schemeClr>
+            </a:solidFill>
+          </p:spPr>
+          <p:style>
+            <a:lnRef idx="2">
+              <a:schemeClr val="accent1">
+                <a:shade val="15000"/>
+              </a:schemeClr>
+            </a:lnRef>
+            <a:fillRef idx="1">
+              <a:schemeClr val="accent1"/>
+            </a:fillRef>
+            <a:effectRef idx="0">
+              <a:schemeClr val="accent1"/>
+            </a:effectRef>
+            <a:fontRef idx="minor">
+              <a:schemeClr val="lt1"/>
+            </a:fontRef>
+          </p:style>
+          <p:txBody>
+            <a:bodyPr rtlCol="0" anchor="ctr"/>
+            <a:lstStyle/>
+            <a:p>
+              <a:pPr algn="ctr"/>
+              <a:r>
+                <a:rPr lang="nl-NL" u="sng" dirty="0">
+                  <a:solidFill>
+                    <a:schemeClr val="tx1"/>
+                  </a:solidFill>
+                </a:rPr>
+                <a:t>ID		</a:t>
+              </a:r>
+            </a:p>
+            <a:p>
+              <a:pPr algn="ctr"/>
+              <a:r>
+                <a:rPr lang="nl-NL" u="sng" dirty="0">
+                  <a:solidFill>
+                    <a:schemeClr val="tx1"/>
+                  </a:solidFill>
+                </a:rPr>
+                <a:t>Herkomst	</a:t>
+              </a:r>
+            </a:p>
+            <a:p>
+              <a:pPr algn="ctr"/>
+              <a:r>
+                <a:rPr lang="nl-NL" u="sng" dirty="0">
+                  <a:solidFill>
+                    <a:schemeClr val="tx1"/>
+                  </a:solidFill>
+                </a:rPr>
+                <a:t>Datum		</a:t>
+              </a:r>
+            </a:p>
+            <a:p>
+              <a:pPr algn="ctr"/>
+              <a:r>
+                <a:rPr lang="nl-NL" u="sng" dirty="0">
+                  <a:solidFill>
+                    <a:schemeClr val="tx1"/>
+                  </a:solidFill>
+                </a:rPr>
+                <a:t>Gewicht		</a:t>
+              </a:r>
+            </a:p>
+            <a:p>
+              <a:pPr algn="ctr"/>
+              <a:r>
+                <a:rPr lang="nl-NL" u="sng" dirty="0">
+                  <a:solidFill>
+                    <a:schemeClr val="tx1"/>
+                  </a:solidFill>
+                </a:rPr>
+                <a:t>Bruikbaarheid	</a:t>
+              </a:r>
+            </a:p>
+          </p:txBody>
+        </p:sp>
+        <p:sp>
+          <p:nvSpPr>
+            <p:cNvPr id="7" name="Rechthoek 6">
+              <a:extLst>
+                <a:ext uri="{FF2B5EF4-FFF2-40B4-BE49-F238E27FC236}">
+                  <a16:creationId xmlns:a16="http://schemas.microsoft.com/office/drawing/2014/main" id="{107E6F49-1ED3-4EF2-75E7-016962DFF73C}"/>
+                </a:ext>
+              </a:extLst>
+            </p:cNvPr>
+            <p:cNvSpPr/>
+            <p:nvPr/>
+          </p:nvSpPr>
+          <p:spPr>
+            <a:xfrm>
+              <a:off x="9011728" y="508958"/>
+              <a:ext cx="2096219" cy="353684"/>
+            </a:xfrm>
+            <a:prstGeom prst="rect">
+              <a:avLst/>
+            </a:prstGeom>
+          </p:spPr>
+          <p:style>
+            <a:lnRef idx="2">
+              <a:schemeClr val="accent1">
+                <a:shade val="15000"/>
+              </a:schemeClr>
+            </a:lnRef>
+            <a:fillRef idx="1">
+              <a:schemeClr val="accent1"/>
+            </a:fillRef>
+            <a:effectRef idx="0">
+              <a:schemeClr val="accent1"/>
+            </a:effectRef>
+            <a:fontRef idx="minor">
+              <a:schemeClr val="lt1"/>
+            </a:fontRef>
+          </p:style>
+          <p:txBody>
+            <a:bodyPr rtlCol="0" anchor="ctr"/>
+            <a:lstStyle/>
+            <a:p>
+              <a:pPr algn="ctr"/>
+              <a:r>
+                <a:rPr lang="nl-NL" dirty="0"/>
+                <a:t>Ontvangst</a:t>
+              </a:r>
+            </a:p>
+          </p:txBody>
+        </p:sp>
+      </p:grpSp>
+      <p:grpSp>
+        <p:nvGrpSpPr>
+          <p:cNvPr id="8" name="Groep 7">
+            <a:extLst>
+              <a:ext uri="{FF2B5EF4-FFF2-40B4-BE49-F238E27FC236}">
+                <a16:creationId xmlns:a16="http://schemas.microsoft.com/office/drawing/2014/main" id="{3D274A2B-0132-E68F-3AFB-A7ED7FEF088E}"/>
+              </a:ext>
+            </a:extLst>
+          </p:cNvPr>
+          <p:cNvGrpSpPr/>
+          <p:nvPr/>
+        </p:nvGrpSpPr>
+        <p:grpSpPr>
+          <a:xfrm>
+            <a:off x="5047890" y="1147312"/>
+            <a:ext cx="2096219" cy="2510288"/>
+            <a:chOff x="9011728" y="508958"/>
+            <a:chExt cx="2096219" cy="2022620"/>
+          </a:xfrm>
+        </p:grpSpPr>
+        <p:sp>
+          <p:nvSpPr>
+            <p:cNvPr id="9" name="Rechthoek 8">
+              <a:extLst>
+                <a:ext uri="{FF2B5EF4-FFF2-40B4-BE49-F238E27FC236}">
+                  <a16:creationId xmlns:a16="http://schemas.microsoft.com/office/drawing/2014/main" id="{BD704A52-0F55-21DF-B5CF-4F5694E1DC1C}"/>
+                </a:ext>
+              </a:extLst>
+            </p:cNvPr>
+            <p:cNvSpPr/>
+            <p:nvPr/>
+          </p:nvSpPr>
+          <p:spPr>
+            <a:xfrm>
+              <a:off x="9011728" y="862642"/>
+              <a:ext cx="2096219" cy="1668936"/>
+            </a:xfrm>
+            <a:prstGeom prst="rect">
+              <a:avLst/>
+            </a:prstGeom>
+            <a:solidFill>
+              <a:schemeClr val="bg2">
+                <a:lumMod val="90000"/>
+              </a:schemeClr>
+            </a:solidFill>
+          </p:spPr>
+          <p:style>
+            <a:lnRef idx="2">
+              <a:schemeClr val="accent1">
+                <a:shade val="15000"/>
+              </a:schemeClr>
+            </a:lnRef>
+            <a:fillRef idx="1">
+              <a:schemeClr val="accent1"/>
+            </a:fillRef>
+            <a:effectRef idx="0">
+              <a:schemeClr val="accent1"/>
+            </a:effectRef>
+            <a:fontRef idx="minor">
+              <a:schemeClr val="lt1"/>
+            </a:fontRef>
+          </p:style>
+          <p:txBody>
+            <a:bodyPr rtlCol="0" anchor="ctr"/>
+            <a:lstStyle/>
+            <a:p>
+              <a:pPr algn="ctr"/>
+              <a:r>
+                <a:rPr lang="nl-NL" u="sng" dirty="0">
+                  <a:solidFill>
+                    <a:schemeClr val="tx1"/>
+                  </a:solidFill>
+                </a:rPr>
+                <a:t>ID		</a:t>
+              </a:r>
+            </a:p>
+            <a:p>
+              <a:pPr algn="ctr"/>
+              <a:r>
+                <a:rPr lang="nl-NL" u="sng" dirty="0">
+                  <a:solidFill>
+                    <a:schemeClr val="tx1"/>
+                  </a:solidFill>
+                </a:rPr>
+                <a:t>Leertype		</a:t>
+              </a:r>
+            </a:p>
+            <a:p>
+              <a:pPr algn="ctr"/>
+              <a:r>
+                <a:rPr lang="nl-NL" u="sng" dirty="0">
+                  <a:solidFill>
+                    <a:schemeClr val="tx1"/>
+                  </a:solidFill>
+                </a:rPr>
+                <a:t>Dikte		</a:t>
+              </a:r>
+            </a:p>
+            <a:p>
+              <a:pPr algn="ctr"/>
+              <a:r>
+                <a:rPr lang="nl-NL" u="sng" dirty="0">
+                  <a:solidFill>
+                    <a:schemeClr val="tx1"/>
+                  </a:solidFill>
+                </a:rPr>
+                <a:t>Maat		</a:t>
+              </a:r>
+            </a:p>
+            <a:p>
+              <a:pPr algn="ctr"/>
+              <a:r>
+                <a:rPr lang="nl-NL" u="sng" dirty="0">
+                  <a:solidFill>
+                    <a:schemeClr val="tx1"/>
+                  </a:solidFill>
+                </a:rPr>
+                <a:t>Gewicht		</a:t>
+              </a:r>
+            </a:p>
+            <a:p>
+              <a:pPr algn="ctr"/>
+              <a:r>
+                <a:rPr lang="nl-NL" u="sng" dirty="0">
+                  <a:solidFill>
+                    <a:schemeClr val="tx1"/>
+                  </a:solidFill>
+                </a:rPr>
+                <a:t>Kleur		</a:t>
+              </a:r>
+            </a:p>
+            <a:p>
+              <a:pPr algn="ctr"/>
+              <a:r>
+                <a:rPr lang="nl-NL" u="sng" dirty="0">
+                  <a:solidFill>
+                    <a:schemeClr val="tx1"/>
+                  </a:solidFill>
+                </a:rPr>
+                <a:t>Prijs		</a:t>
+              </a:r>
+            </a:p>
+          </p:txBody>
+        </p:sp>
+        <p:sp>
+          <p:nvSpPr>
+            <p:cNvPr id="12" name="Rechthoek 11">
+              <a:extLst>
+                <a:ext uri="{FF2B5EF4-FFF2-40B4-BE49-F238E27FC236}">
+                  <a16:creationId xmlns:a16="http://schemas.microsoft.com/office/drawing/2014/main" id="{58CBCC5B-FB93-88BD-CD6C-D9DC68DA1C20}"/>
+                </a:ext>
+              </a:extLst>
+            </p:cNvPr>
+            <p:cNvSpPr/>
+            <p:nvPr/>
+          </p:nvSpPr>
+          <p:spPr>
+            <a:xfrm>
+              <a:off x="9011728" y="508958"/>
+              <a:ext cx="2096219" cy="353684"/>
+            </a:xfrm>
+            <a:prstGeom prst="rect">
+              <a:avLst/>
+            </a:prstGeom>
+          </p:spPr>
+          <p:style>
+            <a:lnRef idx="2">
+              <a:schemeClr val="accent1">
+                <a:shade val="15000"/>
+              </a:schemeClr>
+            </a:lnRef>
+            <a:fillRef idx="1">
+              <a:schemeClr val="accent1"/>
+            </a:fillRef>
+            <a:effectRef idx="0">
+              <a:schemeClr val="accent1"/>
+            </a:effectRef>
+            <a:fontRef idx="minor">
+              <a:schemeClr val="lt1"/>
+            </a:fontRef>
+          </p:style>
+          <p:txBody>
+            <a:bodyPr rtlCol="0" anchor="ctr"/>
+            <a:lstStyle/>
+            <a:p>
+              <a:pPr algn="ctr"/>
+              <a:r>
+                <a:rPr lang="nl-NL" dirty="0"/>
+                <a:t>Voorraad</a:t>
+              </a:r>
+            </a:p>
+          </p:txBody>
+        </p:sp>
+      </p:grpSp>
+      <p:grpSp>
+        <p:nvGrpSpPr>
+          <p:cNvPr id="14" name="Groep 13">
+            <a:extLst>
+              <a:ext uri="{FF2B5EF4-FFF2-40B4-BE49-F238E27FC236}">
+                <a16:creationId xmlns:a16="http://schemas.microsoft.com/office/drawing/2014/main" id="{8121FD48-5300-FFFC-6076-C463907BCE4C}"/>
+              </a:ext>
+            </a:extLst>
+          </p:cNvPr>
+          <p:cNvGrpSpPr/>
+          <p:nvPr/>
+        </p:nvGrpSpPr>
+        <p:grpSpPr>
+          <a:xfrm>
+            <a:off x="8653729" y="1135809"/>
+            <a:ext cx="2096219" cy="2789210"/>
+            <a:chOff x="9011728" y="508958"/>
+            <a:chExt cx="2096219" cy="2789210"/>
+          </a:xfrm>
+        </p:grpSpPr>
+        <p:sp>
+          <p:nvSpPr>
+            <p:cNvPr id="16" name="Rechthoek 15">
+              <a:extLst>
+                <a:ext uri="{FF2B5EF4-FFF2-40B4-BE49-F238E27FC236}">
+                  <a16:creationId xmlns:a16="http://schemas.microsoft.com/office/drawing/2014/main" id="{574ECD19-52B9-5D04-A593-1F332E3A6BD4}"/>
+                </a:ext>
+              </a:extLst>
+            </p:cNvPr>
+            <p:cNvSpPr/>
+            <p:nvPr/>
+          </p:nvSpPr>
+          <p:spPr>
+            <a:xfrm>
+              <a:off x="9011728" y="862642"/>
+              <a:ext cx="2096219" cy="2435526"/>
+            </a:xfrm>
+            <a:prstGeom prst="rect">
+              <a:avLst/>
+            </a:prstGeom>
+            <a:solidFill>
+              <a:schemeClr val="bg2">
+                <a:lumMod val="90000"/>
+              </a:schemeClr>
+            </a:solidFill>
+          </p:spPr>
+          <p:style>
+            <a:lnRef idx="2">
+              <a:schemeClr val="accent1">
+                <a:shade val="15000"/>
+              </a:schemeClr>
+            </a:lnRef>
+            <a:fillRef idx="1">
+              <a:schemeClr val="accent1"/>
+            </a:fillRef>
+            <a:effectRef idx="0">
+              <a:schemeClr val="accent1"/>
+            </a:effectRef>
+            <a:fontRef idx="minor">
+              <a:schemeClr val="lt1"/>
+            </a:fontRef>
+          </p:style>
+          <p:txBody>
+            <a:bodyPr rtlCol="0" anchor="ctr"/>
+            <a:lstStyle/>
+            <a:p>
+              <a:pPr algn="ctr"/>
+              <a:r>
+                <a:rPr lang="nl-NL" u="sng" dirty="0">
+                  <a:solidFill>
+                    <a:schemeClr val="tx1"/>
+                  </a:solidFill>
+                </a:rPr>
+                <a:t>ID		</a:t>
+              </a:r>
+            </a:p>
+            <a:p>
+              <a:pPr algn="ctr"/>
+              <a:r>
+                <a:rPr lang="nl-NL" u="sng" dirty="0">
+                  <a:solidFill>
+                    <a:schemeClr val="tx1"/>
+                  </a:solidFill>
+                </a:rPr>
+                <a:t>Voorraad.ID	</a:t>
+              </a:r>
+            </a:p>
+            <a:p>
+              <a:pPr algn="ctr"/>
+              <a:r>
+                <a:rPr lang="nl-NL" u="sng" dirty="0">
+                  <a:solidFill>
+                    <a:schemeClr val="tx1"/>
+                  </a:solidFill>
+                </a:rPr>
+                <a:t>Locatie		</a:t>
+              </a:r>
+            </a:p>
+            <a:p>
+              <a:pPr algn="ctr"/>
+              <a:r>
+                <a:rPr lang="nl-NL" u="sng" dirty="0">
+                  <a:solidFill>
+                    <a:schemeClr val="tx1"/>
+                  </a:solidFill>
+                </a:rPr>
+                <a:t>Email		</a:t>
+              </a:r>
+            </a:p>
+            <a:p>
+              <a:pPr algn="ctr"/>
+              <a:r>
+                <a:rPr lang="nl-NL" u="sng" dirty="0">
+                  <a:solidFill>
+                    <a:schemeClr val="tx1"/>
+                  </a:solidFill>
+                </a:rPr>
+                <a:t>Prijs		</a:t>
+              </a:r>
+            </a:p>
+            <a:p>
+              <a:pPr algn="ctr"/>
+              <a:r>
+                <a:rPr lang="nl-NL" u="sng" dirty="0">
+                  <a:solidFill>
+                    <a:schemeClr val="tx1"/>
+                  </a:solidFill>
+                </a:rPr>
+                <a:t>Status		</a:t>
+              </a:r>
+            </a:p>
+            <a:p>
+              <a:pPr algn="ctr"/>
+              <a:r>
+                <a:rPr lang="nl-NL" u="sng" dirty="0">
+                  <a:solidFill>
+                    <a:schemeClr val="tx1"/>
+                  </a:solidFill>
+                </a:rPr>
+                <a:t>Besteldatum	</a:t>
+              </a:r>
+            </a:p>
+            <a:p>
+              <a:pPr algn="ctr"/>
+              <a:r>
+                <a:rPr lang="nl-NL" u="sng" dirty="0" err="1">
+                  <a:solidFill>
+                    <a:schemeClr val="tx1"/>
+                  </a:solidFill>
+                </a:rPr>
+                <a:t>VerstuurDatum</a:t>
+              </a:r>
+              <a:r>
+                <a:rPr lang="nl-NL" u="sng" dirty="0">
+                  <a:solidFill>
+                    <a:schemeClr val="tx1"/>
+                  </a:solidFill>
+                </a:rPr>
+                <a:t>	</a:t>
+              </a:r>
+            </a:p>
+          </p:txBody>
+        </p:sp>
+        <p:sp>
+          <p:nvSpPr>
+            <p:cNvPr id="18" name="Rechthoek 17">
+              <a:extLst>
+                <a:ext uri="{FF2B5EF4-FFF2-40B4-BE49-F238E27FC236}">
+                  <a16:creationId xmlns:a16="http://schemas.microsoft.com/office/drawing/2014/main" id="{8270769E-E26F-27F8-6DEC-C467B9BA0266}"/>
+                </a:ext>
+              </a:extLst>
+            </p:cNvPr>
+            <p:cNvSpPr/>
+            <p:nvPr/>
+          </p:nvSpPr>
+          <p:spPr>
+            <a:xfrm>
+              <a:off x="9011728" y="508958"/>
+              <a:ext cx="2096219" cy="353684"/>
+            </a:xfrm>
+            <a:prstGeom prst="rect">
+              <a:avLst/>
+            </a:prstGeom>
+          </p:spPr>
+          <p:style>
+            <a:lnRef idx="2">
+              <a:schemeClr val="accent1">
+                <a:shade val="15000"/>
+              </a:schemeClr>
+            </a:lnRef>
+            <a:fillRef idx="1">
+              <a:schemeClr val="accent1"/>
+            </a:fillRef>
+            <a:effectRef idx="0">
+              <a:schemeClr val="accent1"/>
+            </a:effectRef>
+            <a:fontRef idx="minor">
+              <a:schemeClr val="lt1"/>
+            </a:fontRef>
+          </p:style>
+          <p:txBody>
+            <a:bodyPr rtlCol="0" anchor="ctr"/>
+            <a:lstStyle/>
+            <a:p>
+              <a:pPr algn="ctr"/>
+              <a:r>
+                <a:rPr lang="nl-NL" dirty="0"/>
+                <a:t>bestellingen</a:t>
+              </a:r>
+            </a:p>
+          </p:txBody>
+        </p:sp>
+      </p:grpSp>
+      <p:sp>
+        <p:nvSpPr>
+          <p:cNvPr id="20" name="Gelijkbenige driehoek 19">
+            <a:extLst>
+              <a:ext uri="{FF2B5EF4-FFF2-40B4-BE49-F238E27FC236}">
+                <a16:creationId xmlns:a16="http://schemas.microsoft.com/office/drawing/2014/main" id="{AC289A06-91D4-35E1-3A88-1F5D698183DB}"/>
               </a:ext>
             </a:extLst>
           </p:cNvPr>
@@ -3334,146 +3972,11 @@
           <p:nvPr/>
         </p:nvSpPr>
         <p:spPr>
-          <a:xfrm>
-            <a:off x="767749" y="862642"/>
-            <a:ext cx="2096219" cy="2355012"/>
+          <a:xfrm rot="16200000">
+            <a:off x="8341381" y="1801840"/>
+            <a:ext cx="271010" cy="353684"/>
           </a:xfrm>
-          <a:prstGeom prst="rect">
-            <a:avLst/>
-          </a:prstGeom>
-          <a:solidFill>
-            <a:schemeClr val="bg2">
-              <a:lumMod val="90000"/>
-            </a:schemeClr>
-          </a:solidFill>
-        </p:spPr>
-        <p:style>
-          <a:lnRef idx="2">
-            <a:schemeClr val="accent1">
-              <a:shade val="15000"/>
-            </a:schemeClr>
-          </a:lnRef>
-          <a:fillRef idx="1">
-            <a:schemeClr val="accent1"/>
-          </a:fillRef>
-          <a:effectRef idx="0">
-            <a:schemeClr val="accent1"/>
-          </a:effectRef>
-          <a:fontRef idx="minor">
-            <a:schemeClr val="lt1"/>
-          </a:fontRef>
-        </p:style>
-        <p:txBody>
-          <a:bodyPr rtlCol="0" anchor="ctr"/>
-          <a:lstStyle/>
-          <a:p>
-            <a:pPr algn="ctr"/>
-            <a:r>
-              <a:rPr lang="nl-NL" u="sng" dirty="0">
-                <a:solidFill>
-                  <a:schemeClr val="tx1"/>
-                </a:solidFill>
-              </a:rPr>
-              <a:t>Column1		</a:t>
-            </a:r>
-          </a:p>
-          <a:p>
-            <a:pPr algn="ctr"/>
-            <a:r>
-              <a:rPr lang="nl-NL" u="sng" dirty="0">
-                <a:solidFill>
-                  <a:schemeClr val="tx1"/>
-                </a:solidFill>
-              </a:rPr>
-              <a:t>Column2		</a:t>
-            </a:r>
-          </a:p>
-          <a:p>
-            <a:pPr algn="ctr"/>
-            <a:r>
-              <a:rPr lang="nl-NL" u="sng" dirty="0">
-                <a:solidFill>
-                  <a:schemeClr val="tx1"/>
-                </a:solidFill>
-              </a:rPr>
-              <a:t>Column3		</a:t>
-            </a:r>
-          </a:p>
-          <a:p>
-            <a:pPr algn="ctr"/>
-            <a:r>
-              <a:rPr lang="nl-NL" u="sng" dirty="0">
-                <a:solidFill>
-                  <a:schemeClr val="tx1"/>
-                </a:solidFill>
-              </a:rPr>
-              <a:t>Column4		</a:t>
-            </a:r>
-          </a:p>
-          <a:p>
-            <a:pPr algn="ctr"/>
-            <a:r>
-              <a:rPr lang="nl-NL" u="sng" dirty="0">
-                <a:solidFill>
-                  <a:schemeClr val="tx1"/>
-                </a:solidFill>
-              </a:rPr>
-              <a:t>Column5		</a:t>
-            </a:r>
-          </a:p>
-          <a:p>
-            <a:pPr algn="ctr"/>
-            <a:r>
-              <a:rPr lang="nl-NL" u="sng" dirty="0">
-                <a:solidFill>
-                  <a:schemeClr val="tx1"/>
-                </a:solidFill>
-              </a:rPr>
-              <a:t>Column6		</a:t>
-            </a:r>
-          </a:p>
-          <a:p>
-            <a:pPr algn="ctr"/>
-            <a:r>
-              <a:rPr lang="nl-NL" u="sng" dirty="0">
-                <a:solidFill>
-                  <a:schemeClr val="tx1"/>
-                </a:solidFill>
-              </a:rPr>
-              <a:t>Column7		</a:t>
-            </a:r>
-          </a:p>
-          <a:p>
-            <a:pPr algn="ctr"/>
-            <a:r>
-              <a:rPr lang="nl-NL" u="sng" dirty="0">
-                <a:solidFill>
-                  <a:schemeClr val="tx1"/>
-                </a:solidFill>
-              </a:rPr>
-              <a:t>Column8		</a:t>
-            </a:r>
-          </a:p>
-        </p:txBody>
-      </p:sp>
-      <p:sp>
-        <p:nvSpPr>
-          <p:cNvPr id="11" name="Rechthoek 10">
-            <a:extLst>
-              <a:ext uri="{FF2B5EF4-FFF2-40B4-BE49-F238E27FC236}">
-                <a16:creationId xmlns:a16="http://schemas.microsoft.com/office/drawing/2014/main" id="{4B6A12E5-A11F-566F-4E2D-BD24BAF12A40}"/>
-              </a:ext>
-            </a:extLst>
-          </p:cNvPr>
-          <p:cNvSpPr/>
-          <p:nvPr/>
-        </p:nvSpPr>
-        <p:spPr>
-          <a:xfrm>
-            <a:off x="767750" y="508958"/>
-            <a:ext cx="2096219" cy="353684"/>
-          </a:xfrm>
-          <a:prstGeom prst="rect">
+          <a:prstGeom prst="triangle">
             <a:avLst/>
           </a:prstGeom>
         </p:spPr>
@@ -3498,381 +4001,112 @@
           <a:lstStyle/>
           <a:p>
             <a:pPr algn="ctr"/>
-            <a:r>
-              <a:rPr lang="nl-NL" dirty="0"/>
-              <a:t>Naam1</a:t>
-            </a:r>
-          </a:p>
-        </p:txBody>
-      </p:sp>
-      <p:sp>
-        <p:nvSpPr>
-          <p:cNvPr id="13" name="Rechthoek 12">
-            <a:extLst>
-              <a:ext uri="{FF2B5EF4-FFF2-40B4-BE49-F238E27FC236}">
-                <a16:creationId xmlns:a16="http://schemas.microsoft.com/office/drawing/2014/main" id="{B1742DF7-7DC9-284F-C186-812B1A6EA0A3}"/>
-              </a:ext>
-            </a:extLst>
-          </p:cNvPr>
-          <p:cNvSpPr/>
-          <p:nvPr/>
-        </p:nvSpPr>
-        <p:spPr>
-          <a:xfrm>
-            <a:off x="4819291" y="3965275"/>
-            <a:ext cx="2096219" cy="2355012"/>
-          </a:xfrm>
-          <a:prstGeom prst="rect">
-            <a:avLst/>
-          </a:prstGeom>
-          <a:solidFill>
-            <a:schemeClr val="bg2">
-              <a:lumMod val="90000"/>
-            </a:schemeClr>
-          </a:solidFill>
-        </p:spPr>
-        <p:style>
-          <a:lnRef idx="2">
-            <a:schemeClr val="accent1">
-              <a:shade val="15000"/>
-            </a:schemeClr>
-          </a:lnRef>
-          <a:fillRef idx="1">
-            <a:schemeClr val="accent1"/>
-          </a:fillRef>
-          <a:effectRef idx="0">
-            <a:schemeClr val="accent1"/>
-          </a:effectRef>
-          <a:fontRef idx="minor">
-            <a:schemeClr val="lt1"/>
-          </a:fontRef>
-        </p:style>
-        <p:txBody>
-          <a:bodyPr rtlCol="0" anchor="ctr"/>
-          <a:lstStyle/>
-          <a:p>
-            <a:pPr algn="ctr"/>
-            <a:r>
-              <a:rPr lang="nl-NL" u="sng" dirty="0">
-                <a:solidFill>
-                  <a:schemeClr val="tx1"/>
-                </a:solidFill>
-              </a:rPr>
-              <a:t>Column1		</a:t>
-            </a:r>
-          </a:p>
-          <a:p>
-            <a:pPr algn="ctr"/>
-            <a:r>
-              <a:rPr lang="nl-NL" u="sng" dirty="0">
-                <a:solidFill>
-                  <a:schemeClr val="tx1"/>
-                </a:solidFill>
-              </a:rPr>
-              <a:t>Column2		</a:t>
-            </a:r>
-          </a:p>
-          <a:p>
-            <a:pPr algn="ctr"/>
-            <a:r>
-              <a:rPr lang="nl-NL" u="sng" dirty="0">
-                <a:solidFill>
-                  <a:schemeClr val="tx1"/>
-                </a:solidFill>
-              </a:rPr>
-              <a:t>Column3		</a:t>
-            </a:r>
-          </a:p>
-          <a:p>
-            <a:pPr algn="ctr"/>
-            <a:r>
-              <a:rPr lang="nl-NL" u="sng" dirty="0">
-                <a:solidFill>
-                  <a:schemeClr val="tx1"/>
-                </a:solidFill>
-              </a:rPr>
-              <a:t>Column4		</a:t>
-            </a:r>
-          </a:p>
-          <a:p>
-            <a:pPr algn="ctr"/>
-            <a:r>
-              <a:rPr lang="nl-NL" u="sng" dirty="0">
-                <a:solidFill>
-                  <a:schemeClr val="tx1"/>
-                </a:solidFill>
-              </a:rPr>
-              <a:t>Column5		</a:t>
-            </a:r>
-          </a:p>
-          <a:p>
-            <a:pPr algn="ctr"/>
-            <a:r>
-              <a:rPr lang="nl-NL" u="sng" dirty="0">
-                <a:solidFill>
-                  <a:schemeClr val="tx1"/>
-                </a:solidFill>
-              </a:rPr>
-              <a:t>Column6		</a:t>
-            </a:r>
-          </a:p>
-          <a:p>
-            <a:pPr algn="ctr"/>
-            <a:r>
-              <a:rPr lang="nl-NL" u="sng" dirty="0">
-                <a:solidFill>
-                  <a:schemeClr val="tx1"/>
-                </a:solidFill>
-              </a:rPr>
-              <a:t>Column7		</a:t>
-            </a:r>
-          </a:p>
-          <a:p>
-            <a:pPr algn="ctr"/>
-            <a:r>
-              <a:rPr lang="nl-NL" u="sng" dirty="0">
-                <a:solidFill>
-                  <a:schemeClr val="tx1"/>
-                </a:solidFill>
-              </a:rPr>
-              <a:t>Column8		</a:t>
-            </a:r>
-          </a:p>
-        </p:txBody>
-      </p:sp>
-      <p:sp>
-        <p:nvSpPr>
-          <p:cNvPr id="15" name="Rechthoek 14">
-            <a:extLst>
-              <a:ext uri="{FF2B5EF4-FFF2-40B4-BE49-F238E27FC236}">
-                <a16:creationId xmlns:a16="http://schemas.microsoft.com/office/drawing/2014/main" id="{BD3C609B-54EE-8CA9-D4D4-10A8DA1434F8}"/>
-              </a:ext>
-            </a:extLst>
-          </p:cNvPr>
-          <p:cNvSpPr/>
-          <p:nvPr/>
-        </p:nvSpPr>
-        <p:spPr>
-          <a:xfrm>
-            <a:off x="4819290" y="3611591"/>
-            <a:ext cx="2096219" cy="353684"/>
-          </a:xfrm>
-          <a:prstGeom prst="rect">
-            <a:avLst/>
-          </a:prstGeom>
-        </p:spPr>
-        <p:style>
-          <a:lnRef idx="2">
-            <a:schemeClr val="accent1">
-              <a:shade val="15000"/>
-            </a:schemeClr>
-          </a:lnRef>
-          <a:fillRef idx="1">
-            <a:schemeClr val="accent1"/>
-          </a:fillRef>
-          <a:effectRef idx="0">
-            <a:schemeClr val="accent1"/>
-          </a:effectRef>
-          <a:fontRef idx="minor">
-            <a:schemeClr val="lt1"/>
-          </a:fontRef>
-        </p:style>
-        <p:txBody>
-          <a:bodyPr rtlCol="0" anchor="ctr"/>
-          <a:lstStyle/>
-          <a:p>
-            <a:pPr algn="ctr"/>
-            <a:r>
-              <a:rPr lang="nl-NL" dirty="0"/>
-              <a:t>Naam2</a:t>
-            </a:r>
-          </a:p>
-        </p:txBody>
-      </p:sp>
-      <p:sp>
-        <p:nvSpPr>
-          <p:cNvPr id="17" name="Rechthoek 16">
-            <a:extLst>
-              <a:ext uri="{FF2B5EF4-FFF2-40B4-BE49-F238E27FC236}">
-                <a16:creationId xmlns:a16="http://schemas.microsoft.com/office/drawing/2014/main" id="{DF8F3B02-B58F-BD0B-9F78-A5F229321DCC}"/>
-              </a:ext>
-            </a:extLst>
-          </p:cNvPr>
-          <p:cNvSpPr/>
-          <p:nvPr/>
-        </p:nvSpPr>
-        <p:spPr>
-          <a:xfrm>
-            <a:off x="9011728" y="862642"/>
-            <a:ext cx="2096219" cy="2355012"/>
-          </a:xfrm>
-          <a:prstGeom prst="rect">
-            <a:avLst/>
-          </a:prstGeom>
-          <a:solidFill>
-            <a:schemeClr val="bg2">
-              <a:lumMod val="90000"/>
-            </a:schemeClr>
-          </a:solidFill>
-        </p:spPr>
-        <p:style>
-          <a:lnRef idx="2">
-            <a:schemeClr val="accent1">
-              <a:shade val="15000"/>
-            </a:schemeClr>
-          </a:lnRef>
-          <a:fillRef idx="1">
-            <a:schemeClr val="accent1"/>
-          </a:fillRef>
-          <a:effectRef idx="0">
-            <a:schemeClr val="accent1"/>
-          </a:effectRef>
-          <a:fontRef idx="minor">
-            <a:schemeClr val="lt1"/>
-          </a:fontRef>
-        </p:style>
-        <p:txBody>
-          <a:bodyPr rtlCol="0" anchor="ctr"/>
-          <a:lstStyle/>
-          <a:p>
-            <a:pPr algn="ctr"/>
-            <a:r>
-              <a:rPr lang="nl-NL" u="sng" dirty="0">
-                <a:solidFill>
-                  <a:schemeClr val="tx1"/>
-                </a:solidFill>
-              </a:rPr>
-              <a:t>Column1		</a:t>
-            </a:r>
-          </a:p>
-          <a:p>
-            <a:pPr algn="ctr"/>
-            <a:r>
-              <a:rPr lang="nl-NL" u="sng" dirty="0">
-                <a:solidFill>
-                  <a:schemeClr val="tx1"/>
-                </a:solidFill>
-              </a:rPr>
-              <a:t>Column2		</a:t>
-            </a:r>
-          </a:p>
-          <a:p>
-            <a:pPr algn="ctr"/>
-            <a:r>
-              <a:rPr lang="nl-NL" u="sng" dirty="0">
-                <a:solidFill>
-                  <a:schemeClr val="tx1"/>
-                </a:solidFill>
-              </a:rPr>
-              <a:t>Column3		</a:t>
-            </a:r>
-          </a:p>
-          <a:p>
-            <a:pPr algn="ctr"/>
-            <a:r>
-              <a:rPr lang="nl-NL" u="sng" dirty="0">
-                <a:solidFill>
-                  <a:schemeClr val="tx1"/>
-                </a:solidFill>
-              </a:rPr>
-              <a:t>Column4		</a:t>
-            </a:r>
-          </a:p>
-          <a:p>
-            <a:pPr algn="ctr"/>
-            <a:r>
-              <a:rPr lang="nl-NL" u="sng" dirty="0">
-                <a:solidFill>
-                  <a:schemeClr val="tx1"/>
-                </a:solidFill>
-              </a:rPr>
-              <a:t>Column5		</a:t>
-            </a:r>
-          </a:p>
-          <a:p>
-            <a:pPr algn="ctr"/>
-            <a:r>
-              <a:rPr lang="nl-NL" u="sng" dirty="0">
-                <a:solidFill>
-                  <a:schemeClr val="tx1"/>
-                </a:solidFill>
-              </a:rPr>
-              <a:t>Column6		</a:t>
-            </a:r>
-          </a:p>
-          <a:p>
-            <a:pPr algn="ctr"/>
-            <a:r>
-              <a:rPr lang="nl-NL" u="sng" dirty="0">
-                <a:solidFill>
-                  <a:schemeClr val="tx1"/>
-                </a:solidFill>
-              </a:rPr>
-              <a:t>Column7		</a:t>
-            </a:r>
-          </a:p>
-          <a:p>
-            <a:pPr algn="ctr"/>
-            <a:r>
-              <a:rPr lang="nl-NL" u="sng" dirty="0">
-                <a:solidFill>
-                  <a:schemeClr val="tx1"/>
-                </a:solidFill>
-              </a:rPr>
-              <a:t>Column8		</a:t>
-            </a:r>
-          </a:p>
-        </p:txBody>
-      </p:sp>
-      <p:sp>
-        <p:nvSpPr>
-          <p:cNvPr id="19" name="Rechthoek 18">
-            <a:extLst>
-              <a:ext uri="{FF2B5EF4-FFF2-40B4-BE49-F238E27FC236}">
-                <a16:creationId xmlns:a16="http://schemas.microsoft.com/office/drawing/2014/main" id="{B2B73AD9-18BA-947E-1062-11F70C8F8073}"/>
-              </a:ext>
-            </a:extLst>
-          </p:cNvPr>
-          <p:cNvSpPr/>
-          <p:nvPr/>
-        </p:nvSpPr>
-        <p:spPr>
-          <a:xfrm>
-            <a:off x="9011728" y="508958"/>
-            <a:ext cx="2096219" cy="353684"/>
-          </a:xfrm>
-          <a:prstGeom prst="rect">
-            <a:avLst/>
-          </a:prstGeom>
-        </p:spPr>
-        <p:style>
-          <a:lnRef idx="2">
-            <a:schemeClr val="accent1">
-              <a:shade val="15000"/>
-            </a:schemeClr>
-          </a:lnRef>
-          <a:fillRef idx="1">
-            <a:schemeClr val="accent1"/>
-          </a:fillRef>
-          <a:effectRef idx="0">
-            <a:schemeClr val="accent1"/>
-          </a:effectRef>
-          <a:fontRef idx="minor">
-            <a:schemeClr val="lt1"/>
-          </a:fontRef>
-        </p:style>
-        <p:txBody>
-          <a:bodyPr rtlCol="0" anchor="ctr"/>
-          <a:lstStyle/>
-          <a:p>
-            <a:pPr algn="ctr"/>
-            <a:r>
-              <a:rPr lang="nl-NL" dirty="0"/>
-              <a:t>Naam3</a:t>
-            </a:r>
-          </a:p>
-        </p:txBody>
-      </p:sp>
+            <a:endParaRPr lang="nl-NL"/>
+          </a:p>
+        </p:txBody>
+      </p:sp>
+      <mc:AlternateContent xmlns:mc="http://schemas.openxmlformats.org/markup-compatibility/2006">
+        <mc:Choice xmlns:p14="http://schemas.microsoft.com/office/powerpoint/2010/main" Requires="p14">
+          <p:contentPart p14:bwMode="auto" r:id="rId2">
+            <p14:nvContentPartPr>
+              <p14:cNvPr id="22" name="Inkt 21">
+                <a:extLst>
+                  <a:ext uri="{FF2B5EF4-FFF2-40B4-BE49-F238E27FC236}">
+                    <a16:creationId xmlns:a16="http://schemas.microsoft.com/office/drawing/2014/main" id="{8902988B-211E-666A-B104-2E4D8258301A}"/>
+                  </a:ext>
+                </a:extLst>
+              </p14:cNvPr>
+              <p14:cNvContentPartPr/>
+              <p14:nvPr/>
+            </p14:nvContentPartPr>
+            <p14:xfrm>
+              <a:off x="7151189" y="1759537"/>
+              <a:ext cx="1147680" cy="224640"/>
+            </p14:xfrm>
+          </p:contentPart>
+        </mc:Choice>
+        <mc:Fallback>
+          <p:pic>
+            <p:nvPicPr>
+              <p:cNvPr id="22" name="Inkt 21">
+                <a:extLst>
+                  <a:ext uri="{FF2B5EF4-FFF2-40B4-BE49-F238E27FC236}">
+                    <a16:creationId xmlns:a16="http://schemas.microsoft.com/office/drawing/2014/main" id="{8902988B-211E-666A-B104-2E4D8258301A}"/>
+                  </a:ext>
+                </a:extLst>
+              </p:cNvPr>
+              <p:cNvPicPr/>
+              <p:nvPr/>
+            </p:nvPicPr>
+            <p:blipFill>
+              <a:blip r:embed="rId3"/>
+              <a:stretch>
+                <a:fillRect/>
+              </a:stretch>
+            </p:blipFill>
+            <p:spPr>
+              <a:xfrm>
+                <a:off x="7145069" y="1753417"/>
+                <a:ext cx="1159920" cy="236880"/>
+              </a:xfrm>
+              <a:prstGeom prst="rect">
+                <a:avLst/>
+              </a:prstGeom>
+            </p:spPr>
+          </p:pic>
+        </mc:Fallback>
+      </mc:AlternateContent>
+      <mc:AlternateContent xmlns:mc="http://schemas.openxmlformats.org/markup-compatibility/2006">
+        <mc:Choice xmlns:p14="http://schemas.microsoft.com/office/powerpoint/2010/main" Requires="p14">
+          <p:contentPart p14:bwMode="auto" r:id="rId4">
+            <p14:nvContentPartPr>
+              <p14:cNvPr id="23" name="Inkt 22">
+                <a:extLst>
+                  <a:ext uri="{FF2B5EF4-FFF2-40B4-BE49-F238E27FC236}">
+                    <a16:creationId xmlns:a16="http://schemas.microsoft.com/office/drawing/2014/main" id="{43FC3899-1BDB-596F-DE67-C027D13A1B7A}"/>
+                  </a:ext>
+                </a:extLst>
+              </p14:cNvPr>
+              <p14:cNvContentPartPr/>
+              <p14:nvPr/>
+            </p14:nvContentPartPr>
+            <p14:xfrm>
+              <a:off x="7280429" y="1664857"/>
+              <a:ext cx="360" cy="206280"/>
+            </p14:xfrm>
+          </p:contentPart>
+        </mc:Choice>
+        <mc:Fallback>
+          <p:pic>
+            <p:nvPicPr>
+              <p:cNvPr id="23" name="Inkt 22">
+                <a:extLst>
+                  <a:ext uri="{FF2B5EF4-FFF2-40B4-BE49-F238E27FC236}">
+                    <a16:creationId xmlns:a16="http://schemas.microsoft.com/office/drawing/2014/main" id="{43FC3899-1BDB-596F-DE67-C027D13A1B7A}"/>
+                  </a:ext>
+                </a:extLst>
+              </p:cNvPr>
+              <p:cNvPicPr/>
+              <p:nvPr/>
+            </p:nvPicPr>
+            <p:blipFill>
+              <a:blip r:embed="rId5"/>
+              <a:stretch>
+                <a:fillRect/>
+              </a:stretch>
+            </p:blipFill>
+            <p:spPr>
+              <a:xfrm>
+                <a:off x="7274309" y="1658737"/>
+                <a:ext cx="12600" cy="218520"/>
+              </a:xfrm>
+              <a:prstGeom prst="rect">
+                <a:avLst/>
+              </a:prstGeom>
+            </p:spPr>
+          </p:pic>
+        </mc:Fallback>
+      </mc:AlternateContent>
     </p:spTree>
     <p:extLst>
       <p:ext uri="{BB962C8B-B14F-4D97-AF65-F5344CB8AC3E}">
